--- a/docs/user-guide/presentations/03-push-guide.pptx
+++ b/docs/user-guide/presentations/03-push-guide.pptx
@@ -14,9 +14,10 @@
     <p:sldId id="262" r:id="rId8"/>
     <p:sldId id="263" r:id="rId9"/>
     <p:sldId id="264" r:id="rId10"/>
+    <p:sldId id="265" r:id="rId11"/>
   </p:sldIdLst>
   <p:notesMasterIdLst>
-    <p:notesMasterId r:id="rId11"/>
+    <p:notesMasterId r:id="rId12"/>
   </p:notesMasterIdLst>
   <p:sldSz cx="9144000" cy="5143500"/>
   <p:notesSz cx="5143500" cy="9144000"/>
@@ -534,6 +535,94 @@
             <a:fld id="{F7021451-1387-4CA6-816F-3879F97B5CBC}" type="slidenum">
               <a:rPr lang="en-US"/>
               <a:t>1</a:t>
+            </a:fld>
+            <a:endParaRPr lang="en-US"/>
+          </a:p>
+        </p:txBody>
+      </p:sp>
+    </p:spTree>
+    <p:extLst>
+      <p:ext uri="{BB962C8B-B14F-4D97-AF65-F5344CB8AC3E}">
+        <p14:creationId xmlns:p14="http://schemas.microsoft.com/office/powerpoint/2010/main" val="1024086991"/>
+      </p:ext>
+    </p:extLst>
+  </p:cSld>
+  <p:clrMapOvr>
+    <a:masterClrMapping/>
+  </p:clrMapOvr>
+</p:notes>
+</file>
+
+<file path=ppt/notesSlides/notesSlide10.xml><?xml version="1.0" encoding="utf-8"?>
+<p:notes xmlns:a="http://schemas.openxmlformats.org/drawingml/2006/main" xmlns:r="http://schemas.openxmlformats.org/officeDocument/2006/relationships" xmlns:p="http://schemas.openxmlformats.org/presentationml/2006/main">
+  <p:cSld>
+    <p:spTree>
+      <p:nvGrpSpPr>
+        <p:cNvPr id="1" name=""/>
+        <p:cNvGrpSpPr/>
+        <p:nvPr/>
+      </p:nvGrpSpPr>
+      <p:grpSpPr>
+        <a:xfrm>
+          <a:off x="0" y="0"/>
+          <a:ext cx="0" cy="0"/>
+          <a:chOff x="0" y="0"/>
+          <a:chExt cx="0" cy="0"/>
+        </a:xfrm>
+      </p:grpSpPr>
+      <p:sp>
+        <p:nvSpPr>
+          <p:cNvPr id="2" name="Slide Image Placeholder 1"/>
+          <p:cNvSpPr>
+            <a:spLocks noGrp="1" noRot="1" noChangeAspect="1"/>
+          </p:cNvSpPr>
+          <p:nvPr>
+            <p:ph type="sldImg"/>
+          </p:nvPr>
+        </p:nvSpPr>
+        <p:spPr/>
+      </p:sp>
+      <p:sp>
+        <p:nvSpPr>
+          <p:cNvPr id="3" name="Notes Placeholder 2"/>
+          <p:cNvSpPr>
+            <a:spLocks noGrp="1"/>
+          </p:cNvSpPr>
+          <p:nvPr>
+            <p:ph type="body" idx="1"/>
+          </p:nvPr>
+        </p:nvSpPr>
+        <p:spPr/>
+        <p:txBody>
+          <a:bodyPr/>
+          <a:lstStyle/>
+          <a:p>
+            <a:r>
+              <a:rPr lang="en-US" dirty="0"/>
+              <a:t/>
+            </a:r>
+            <a:endParaRPr lang="en-US" dirty="0"/>
+          </a:p>
+        </p:txBody>
+      </p:sp>
+      <p:sp>
+        <p:nvSpPr>
+          <p:cNvPr id="4" name="Slide Number Placeholder 3"/>
+          <p:cNvSpPr>
+            <a:spLocks noGrp="1"/>
+          </p:cNvSpPr>
+          <p:nvPr>
+            <p:ph type="sldNum" sz="quarter" idx="10"/>
+          </p:nvPr>
+        </p:nvSpPr>
+        <p:spPr/>
+        <p:txBody>
+          <a:bodyPr/>
+          <a:lstStyle/>
+          <a:p>
+            <a:fld id="{F7021451-1387-4CA6-816F-3879F97B5CBC}" type="slidenum">
+              <a:rPr lang="en-US"/>
+              <a:t>10</a:t>
             </a:fld>
             <a:endParaRPr lang="en-US"/>
           </a:p>
@@ -1859,6 +1948,103 @@
 </p:sld>
 </file>
 
+<file path=ppt/slides/slide10.xml><?xml version="1.0" encoding="utf-8"?>
+<p:sld xmlns:a="http://schemas.openxmlformats.org/drawingml/2006/main" xmlns:r="http://schemas.openxmlformats.org/officeDocument/2006/relationships" xmlns:p="http://schemas.openxmlformats.org/presentationml/2006/main">
+  <p:cSld name="Slide 10">
+    <p:spTree>
+      <p:nvGrpSpPr>
+        <p:cNvPr id="1" name=""/>
+        <p:cNvGrpSpPr/>
+        <p:nvPr/>
+      </p:nvGrpSpPr>
+      <p:grpSpPr>
+        <a:xfrm>
+          <a:off x="0" y="0"/>
+          <a:ext cx="0" cy="0"/>
+          <a:chOff x="0" y="0"/>
+          <a:chExt cx="0" cy="0"/>
+        </a:xfrm>
+      </p:grpSpPr>
+      <p:sp>
+        <p:nvSpPr>
+          <p:cNvPr id="2" name="Text 0"/>
+          <p:cNvSpPr/>
+          <p:nvPr/>
+        </p:nvSpPr>
+        <p:spPr>
+          <a:xfrm>
+            <a:off x="457200" y="2057400"/>
+            <a:ext cx="8229600" cy="914400"/>
+          </a:xfrm>
+          <a:prstGeom prst="rect">
+            <a:avLst/>
+          </a:prstGeom>
+          <a:noFill/>
+          <a:ln/>
+        </p:spPr>
+        <p:txBody>
+          <a:bodyPr wrap="square" rtlCol="0" anchor="ctr"/>
+          <a:lstStyle/>
+          <a:p>
+            <a:pPr algn="ctr" indent="0" marL="0">
+              <a:buNone/>
+            </a:pPr>
+            <a:r>
+              <a:rPr lang="en-US" sz="4400" b="1" dirty="0">
+                <a:solidFill>
+                  <a:srgbClr val="3B82F6"/>
+                </a:solidFill>
+              </a:rPr>
+              <a:t>감사합니다</a:t>
+            </a:r>
+            <a:endParaRPr lang="en-US" sz="4400" dirty="0"/>
+          </a:p>
+        </p:txBody>
+      </p:sp>
+      <p:sp>
+        <p:nvSpPr>
+          <p:cNvPr id="3" name="Text 1"/>
+          <p:cNvSpPr/>
+          <p:nvPr/>
+        </p:nvSpPr>
+        <p:spPr>
+          <a:xfrm>
+            <a:off x="457200" y="2828925"/>
+            <a:ext cx="8229600" cy="457200"/>
+          </a:xfrm>
+          <a:prstGeom prst="rect">
+            <a:avLst/>
+          </a:prstGeom>
+          <a:noFill/>
+          <a:ln/>
+        </p:spPr>
+        <p:txBody>
+          <a:bodyPr wrap="square" rtlCol="0" anchor="ctr"/>
+          <a:lstStyle/>
+          <a:p>
+            <a:pPr algn="ctr" indent="0" marL="0">
+              <a:buNone/>
+            </a:pPr>
+            <a:r>
+              <a:rPr lang="en-US" sz="1800" dirty="0">
+                <a:solidFill>
+                  <a:srgbClr val="6B7280"/>
+                </a:solidFill>
+              </a:rPr>
+              <a:t>문의: 관리자에게 연락</a:t>
+            </a:r>
+            <a:endParaRPr lang="en-US" sz="1800" dirty="0"/>
+          </a:p>
+        </p:txBody>
+      </p:sp>
+    </p:spTree>
+  </p:cSld>
+  <p:clrMapOvr>
+    <a:masterClrMapping/>
+  </p:clrMapOvr>
+</p:sld>
+</file>
+
 <file path=ppt/slides/slide2.xml><?xml version="1.0" encoding="utf-8"?>
 <p:sld xmlns:a="http://schemas.openxmlformats.org/drawingml/2006/main" xmlns:r="http://schemas.openxmlformats.org/officeDocument/2006/relationships" xmlns:p="http://schemas.openxmlformats.org/presentationml/2006/main">
   <p:cSld name="Slide 2">
@@ -5375,22 +5561,45 @@
                   <a:srgbClr val="1E40AF"/>
                 </a:solidFill>
               </a:rPr>
-              <a:t>알림 설정 변경</a:t>
+              <a:t>알림 설정 화면</a:t>
             </a:r>
             <a:endParaRPr lang="en-US" sz="2800" dirty="0"/>
           </a:p>
         </p:txBody>
       </p:sp>
-      <p:sp>
-        <p:nvSpPr>
-          <p:cNvPr id="3" name="Text 1"/>
+      <p:pic>
+        <p:nvPicPr>
+          <p:cNvPr id="3" name="Image 0" descr="/Users/wandosea/Documents/GitHub/expense-system/docs/user-guide/screenshots/push-settings.png">    </p:cNvPr>
+          <p:cNvPicPr>
+            <a:picLocks noChangeAspect="1"/>
+          </p:cNvPicPr>
+          <p:nvPr/>
+        </p:nvPicPr>
+        <p:blipFill>
+          <a:blip r:embed="rId1"/>
+          <a:srcRect l="0" r="0" t="0" b="0"/>
+          <a:stretch/>
+        </p:blipFill>
+        <p:spPr>
+          <a:xfrm>
+            <a:off x="457200" y="914400"/>
+            <a:ext cx="8229600" cy="3657600"/>
+          </a:xfrm>
+          <a:prstGeom prst="rect">
+            <a:avLst/>
+          </a:prstGeom>
+        </p:spPr>
+      </p:pic>
+      <p:sp>
+        <p:nvSpPr>
+          <p:cNvPr id="4" name="Text 1"/>
           <p:cNvSpPr/>
           <p:nvPr/>
         </p:nvSpPr>
         <p:spPr>
           <a:xfrm>
-            <a:off x="640080" y="914400"/>
-            <a:ext cx="7772400" cy="0"/>
+            <a:off x="457200" y="4754880"/>
+            <a:ext cx="8229600" cy="0"/>
           </a:xfrm>
           <a:prstGeom prst="rect">
             <a:avLst/>
@@ -5402,296 +5611,18 @@
           <a:bodyPr wrap="square" rtlCol="0" anchor="ctr"/>
           <a:lstStyle/>
           <a:p>
+            <a:pPr indent="0" marL="0">
+              <a:buNone/>
+            </a:pPr>
             <a:r>
-              <a:rPr lang="en-US" sz="1400" dirty="0">
+              <a:rPr lang="en-US" sz="1200" dirty="0">
                 <a:solidFill>
-                  <a:srgbClr val="374151"/>
+                  <a:srgbClr val="6B7280"/>
                 </a:solidFill>
               </a:rPr>
-              <a:t>설정 페이지 접근:</a:t>
+              <a:t>프로필 → 설정 → 알림 설정</a:t>
             </a:r>
-            <a:endParaRPr lang="en-US" sz="1400" dirty="0"/>
-          </a:p>
-        </p:txBody>
-      </p:sp>
-      <p:sp>
-        <p:nvSpPr>
-          <p:cNvPr id="4" name="Text 2"/>
-          <p:cNvSpPr/>
-          <p:nvPr/>
-        </p:nvSpPr>
-        <p:spPr>
-          <a:xfrm>
-            <a:off x="640080" y="1280160"/>
-            <a:ext cx="7772400" cy="0"/>
-          </a:xfrm>
-          <a:prstGeom prst="rect">
-            <a:avLst/>
-          </a:prstGeom>
-          <a:noFill/>
-          <a:ln/>
-        </p:spPr>
-        <p:txBody>
-          <a:bodyPr wrap="square" rtlCol="0" anchor="ctr"/>
-          <a:lstStyle/>
-          <a:p>
-            <a:r>
-              <a:rPr lang="en-US" sz="1400" dirty="0">
-                <a:solidFill>
-                  <a:srgbClr val="374151"/>
-                </a:solidFill>
-              </a:rPr>
-              <a:t>  프로필 아이콘 → "설정" → "알림 설정" 탭</a:t>
-            </a:r>
-            <a:endParaRPr lang="en-US" sz="1400" dirty="0"/>
-          </a:p>
-        </p:txBody>
-      </p:sp>
-      <p:sp>
-        <p:nvSpPr>
-          <p:cNvPr id="5" name="Text 3"/>
-          <p:cNvSpPr/>
-          <p:nvPr/>
-        </p:nvSpPr>
-        <p:spPr>
-          <a:xfrm>
-            <a:off x="640080" y="1645920"/>
-            <a:ext cx="7772400" cy="0"/>
-          </a:xfrm>
-          <a:prstGeom prst="rect">
-            <a:avLst/>
-          </a:prstGeom>
-          <a:noFill/>
-          <a:ln/>
-        </p:spPr>
-        <p:txBody>
-          <a:bodyPr wrap="square" rtlCol="0" anchor="ctr"/>
-          <a:lstStyle/>
-          <a:p>
-            <a:endParaRPr lang="en-US" sz="1400" dirty="0"/>
-          </a:p>
-        </p:txBody>
-      </p:sp>
-      <p:sp>
-        <p:nvSpPr>
-          <p:cNvPr id="6" name="Text 4"/>
-          <p:cNvSpPr/>
-          <p:nvPr/>
-        </p:nvSpPr>
-        <p:spPr>
-          <a:xfrm>
-            <a:off x="640080" y="2011680"/>
-            <a:ext cx="7772400" cy="0"/>
-          </a:xfrm>
-          <a:prstGeom prst="rect">
-            <a:avLst/>
-          </a:prstGeom>
-          <a:noFill/>
-          <a:ln/>
-        </p:spPr>
-        <p:txBody>
-          <a:bodyPr wrap="square" rtlCol="0" anchor="ctr"/>
-          <a:lstStyle/>
-          <a:p>
-            <a:r>
-              <a:rPr lang="en-US" sz="1400" dirty="0">
-                <a:solidFill>
-                  <a:srgbClr val="374151"/>
-                </a:solidFill>
-              </a:rPr>
-              <a:t>채널별 설정:</a:t>
-            </a:r>
-            <a:endParaRPr lang="en-US" sz="1400" dirty="0"/>
-          </a:p>
-        </p:txBody>
-      </p:sp>
-      <p:sp>
-        <p:nvSpPr>
-          <p:cNvPr id="7" name="Text 5"/>
-          <p:cNvSpPr/>
-          <p:nvPr/>
-        </p:nvSpPr>
-        <p:spPr>
-          <a:xfrm>
-            <a:off x="640080" y="2377440"/>
-            <a:ext cx="7772400" cy="0"/>
-          </a:xfrm>
-          <a:prstGeom prst="rect">
-            <a:avLst/>
-          </a:prstGeom>
-          <a:noFill/>
-          <a:ln/>
-        </p:spPr>
-        <p:txBody>
-          <a:bodyPr wrap="square" rtlCol="0" anchor="ctr"/>
-          <a:lstStyle/>
-          <a:p>
-            <a:r>
-              <a:rPr lang="en-US" sz="1400" dirty="0">
-                <a:solidFill>
-                  <a:srgbClr val="374151"/>
-                </a:solidFill>
-              </a:rPr>
-              <a:t>  - SMS 알림 수신 여부</a:t>
-            </a:r>
-            <a:endParaRPr lang="en-US" sz="1400" dirty="0"/>
-          </a:p>
-        </p:txBody>
-      </p:sp>
-      <p:sp>
-        <p:nvSpPr>
-          <p:cNvPr id="8" name="Text 6"/>
-          <p:cNvSpPr/>
-          <p:nvPr/>
-        </p:nvSpPr>
-        <p:spPr>
-          <a:xfrm>
-            <a:off x="640080" y="2743200"/>
-            <a:ext cx="7772400" cy="0"/>
-          </a:xfrm>
-          <a:prstGeom prst="rect">
-            <a:avLst/>
-          </a:prstGeom>
-          <a:noFill/>
-          <a:ln/>
-        </p:spPr>
-        <p:txBody>
-          <a:bodyPr wrap="square" rtlCol="0" anchor="ctr"/>
-          <a:lstStyle/>
-          <a:p>
-            <a:r>
-              <a:rPr lang="en-US" sz="1400" dirty="0">
-                <a:solidFill>
-                  <a:srgbClr val="374151"/>
-                </a:solidFill>
-              </a:rPr>
-              <a:t>  - 카카오 알림톡 수신 여부</a:t>
-            </a:r>
-            <a:endParaRPr lang="en-US" sz="1400" dirty="0"/>
-          </a:p>
-        </p:txBody>
-      </p:sp>
-      <p:sp>
-        <p:nvSpPr>
-          <p:cNvPr id="9" name="Text 7"/>
-          <p:cNvSpPr/>
-          <p:nvPr/>
-        </p:nvSpPr>
-        <p:spPr>
-          <a:xfrm>
-            <a:off x="640080" y="3108960"/>
-            <a:ext cx="7772400" cy="0"/>
-          </a:xfrm>
-          <a:prstGeom prst="rect">
-            <a:avLst/>
-          </a:prstGeom>
-          <a:noFill/>
-          <a:ln/>
-        </p:spPr>
-        <p:txBody>
-          <a:bodyPr wrap="square" rtlCol="0" anchor="ctr"/>
-          <a:lstStyle/>
-          <a:p>
-            <a:r>
-              <a:rPr lang="en-US" sz="1400" dirty="0">
-                <a:solidFill>
-                  <a:srgbClr val="374151"/>
-                </a:solidFill>
-              </a:rPr>
-              <a:t>  - 웹 푸시 알림 수신 여부</a:t>
-            </a:r>
-            <a:endParaRPr lang="en-US" sz="1400" dirty="0"/>
-          </a:p>
-        </p:txBody>
-      </p:sp>
-      <p:sp>
-        <p:nvSpPr>
-          <p:cNvPr id="10" name="Text 8"/>
-          <p:cNvSpPr/>
-          <p:nvPr/>
-        </p:nvSpPr>
-        <p:spPr>
-          <a:xfrm>
-            <a:off x="640080" y="3474720"/>
-            <a:ext cx="7772400" cy="0"/>
-          </a:xfrm>
-          <a:prstGeom prst="rect">
-            <a:avLst/>
-          </a:prstGeom>
-          <a:noFill/>
-          <a:ln/>
-        </p:spPr>
-        <p:txBody>
-          <a:bodyPr wrap="square" rtlCol="0" anchor="ctr"/>
-          <a:lstStyle/>
-          <a:p>
-            <a:endParaRPr lang="en-US" sz="1400" dirty="0"/>
-          </a:p>
-        </p:txBody>
-      </p:sp>
-      <p:sp>
-        <p:nvSpPr>
-          <p:cNvPr id="11" name="Text 9"/>
-          <p:cNvSpPr/>
-          <p:nvPr/>
-        </p:nvSpPr>
-        <p:spPr>
-          <a:xfrm>
-            <a:off x="640080" y="3840480"/>
-            <a:ext cx="7772400" cy="0"/>
-          </a:xfrm>
-          <a:prstGeom prst="rect">
-            <a:avLst/>
-          </a:prstGeom>
-          <a:noFill/>
-          <a:ln/>
-        </p:spPr>
-        <p:txBody>
-          <a:bodyPr wrap="square" rtlCol="0" anchor="ctr"/>
-          <a:lstStyle/>
-          <a:p>
-            <a:r>
-              <a:rPr lang="en-US" sz="1400" dirty="0">
-                <a:solidFill>
-                  <a:srgbClr val="374151"/>
-                </a:solidFill>
-              </a:rPr>
-              <a:t>이벤트별 설정:</a:t>
-            </a:r>
-            <a:endParaRPr lang="en-US" sz="1400" dirty="0"/>
-          </a:p>
-        </p:txBody>
-      </p:sp>
-      <p:sp>
-        <p:nvSpPr>
-          <p:cNvPr id="12" name="Text 10"/>
-          <p:cNvSpPr/>
-          <p:nvPr/>
-        </p:nvSpPr>
-        <p:spPr>
-          <a:xfrm>
-            <a:off x="640080" y="4206240"/>
-            <a:ext cx="7772400" cy="0"/>
-          </a:xfrm>
-          <a:prstGeom prst="rect">
-            <a:avLst/>
-          </a:prstGeom>
-          <a:noFill/>
-          <a:ln/>
-        </p:spPr>
-        <p:txBody>
-          <a:bodyPr wrap="square" rtlCol="0" anchor="ctr"/>
-          <a:lstStyle/>
-          <a:p>
-            <a:r>
-              <a:rPr lang="en-US" sz="1400" dirty="0">
-                <a:solidFill>
-                  <a:srgbClr val="374151"/>
-                </a:solidFill>
-              </a:rPr>
-              <a:t>  각 이벤트(제출/승인/반려/지급완료)별로 개별 설정 가능</a:t>
-            </a:r>
-            <a:endParaRPr lang="en-US" sz="1400" dirty="0"/>
+            <a:endParaRPr lang="en-US" sz="1200" dirty="0"/>
           </a:p>
         </p:txBody>
       </p:sp>
@@ -5795,7 +5726,7 @@
                   <a:srgbClr val="1E40AF"/>
                 </a:solidFill>
               </a:rPr>
-              <a:t>문제 해결 - 알림이 오지 않음</a:t>
+              <a:t>알림 설정 변경</a:t>
             </a:r>
             <a:endParaRPr lang="en-US" sz="2800" dirty="0"/>
           </a:p>
@@ -5828,7 +5759,7 @@
                   <a:srgbClr val="374151"/>
                 </a:solidFill>
               </a:rPr>
-              <a:t>1. 브라우저 설정 확인</a:t>
+              <a:t>설정 페이지 접근:</a:t>
             </a:r>
             <a:endParaRPr lang="en-US" sz="1400" dirty="0"/>
           </a:p>
@@ -5861,7 +5792,7 @@
                   <a:srgbClr val="374151"/>
                 </a:solidFill>
               </a:rPr>
-              <a:t>   주소창 자물쇠 아이콘 → 사이트 설정 → 알림 허용</a:t>
+              <a:t>  프로필 아이콘 → "설정" → "알림 설정" 탭</a:t>
             </a:r>
             <a:endParaRPr lang="en-US" sz="1400" dirty="0"/>
           </a:p>
@@ -5919,7 +5850,7 @@
                   <a:srgbClr val="374151"/>
                 </a:solidFill>
               </a:rPr>
-              <a:t>2. 운영체제 설정 확인</a:t>
+              <a:t>채널별 설정:</a:t>
             </a:r>
             <a:endParaRPr lang="en-US" sz="1400" dirty="0"/>
           </a:p>
@@ -5952,7 +5883,7 @@
                   <a:srgbClr val="374151"/>
                 </a:solidFill>
               </a:rPr>
-              <a:t>   Windows/macOS: 설정 → 알림 → 브라우저 앱 허용</a:t>
+              <a:t>  - SMS 알림 수신 여부</a:t>
             </a:r>
             <a:endParaRPr lang="en-US" sz="1400" dirty="0"/>
           </a:p>
@@ -5979,6 +5910,14 @@
           <a:bodyPr wrap="square" rtlCol="0" anchor="ctr"/>
           <a:lstStyle/>
           <a:p>
+            <a:r>
+              <a:rPr lang="en-US" sz="1400" dirty="0">
+                <a:solidFill>
+                  <a:srgbClr val="374151"/>
+                </a:solidFill>
+              </a:rPr>
+              <a:t>  - 카카오 알림톡 수신 여부</a:t>
+            </a:r>
             <a:endParaRPr lang="en-US" sz="1400" dirty="0"/>
           </a:p>
         </p:txBody>
@@ -6010,7 +5949,7 @@
                   <a:srgbClr val="374151"/>
                 </a:solidFill>
               </a:rPr>
-              <a:t>3. 방해 금지 모드 확인</a:t>
+              <a:t>  - 웹 푸시 알림 수신 여부</a:t>
             </a:r>
             <a:endParaRPr lang="en-US" sz="1400" dirty="0"/>
           </a:p>
@@ -6037,13 +5976,71 @@
           <a:bodyPr wrap="square" rtlCol="0" anchor="ctr"/>
           <a:lstStyle/>
           <a:p>
+            <a:endParaRPr lang="en-US" sz="1400" dirty="0"/>
+          </a:p>
+        </p:txBody>
+      </p:sp>
+      <p:sp>
+        <p:nvSpPr>
+          <p:cNvPr id="11" name="Text 9"/>
+          <p:cNvSpPr/>
+          <p:nvPr/>
+        </p:nvSpPr>
+        <p:spPr>
+          <a:xfrm>
+            <a:off x="640080" y="3840480"/>
+            <a:ext cx="7772400" cy="0"/>
+          </a:xfrm>
+          <a:prstGeom prst="rect">
+            <a:avLst/>
+          </a:prstGeom>
+          <a:noFill/>
+          <a:ln/>
+        </p:spPr>
+        <p:txBody>
+          <a:bodyPr wrap="square" rtlCol="0" anchor="ctr"/>
+          <a:lstStyle/>
+          <a:p>
             <a:r>
               <a:rPr lang="en-US" sz="1400" dirty="0">
                 <a:solidFill>
                   <a:srgbClr val="374151"/>
                 </a:solidFill>
               </a:rPr>
-              <a:t>   방해 금지 모드가 켜져 있으면 알림이 표시되지 않음</a:t>
+              <a:t>이벤트별 설정:</a:t>
+            </a:r>
+            <a:endParaRPr lang="en-US" sz="1400" dirty="0"/>
+          </a:p>
+        </p:txBody>
+      </p:sp>
+      <p:sp>
+        <p:nvSpPr>
+          <p:cNvPr id="12" name="Text 10"/>
+          <p:cNvSpPr/>
+          <p:nvPr/>
+        </p:nvSpPr>
+        <p:spPr>
+          <a:xfrm>
+            <a:off x="640080" y="4206240"/>
+            <a:ext cx="7772400" cy="0"/>
+          </a:xfrm>
+          <a:prstGeom prst="rect">
+            <a:avLst/>
+          </a:prstGeom>
+          <a:noFill/>
+          <a:ln/>
+        </p:spPr>
+        <p:txBody>
+          <a:bodyPr wrap="square" rtlCol="0" anchor="ctr"/>
+          <a:lstStyle/>
+          <a:p>
+            <a:r>
+              <a:rPr lang="en-US" sz="1400" dirty="0">
+                <a:solidFill>
+                  <a:srgbClr val="374151"/>
+                </a:solidFill>
+              </a:rPr>
+              <a:t>  각 이벤트(제출/승인/반려/지급완료)별로 개별 설정 가능</a:t>
             </a:r>
             <a:endParaRPr lang="en-US" sz="1400" dirty="0"/>
           </a:p>
@@ -6149,7 +6146,7 @@
                   <a:srgbClr val="1E40AF"/>
                 </a:solidFill>
               </a:rPr>
-              <a:t>권한 거부 시 다시 허용하기</a:t>
+              <a:t>문제 해결 - 알림이 오지 않음</a:t>
             </a:r>
             <a:endParaRPr lang="en-US" sz="2800" dirty="0"/>
           </a:p>
@@ -6182,7 +6179,7 @@
                   <a:srgbClr val="374151"/>
                 </a:solidFill>
               </a:rPr>
-              <a:t>Chrome:</a:t>
+              <a:t>1. 브라우저 설정 확인</a:t>
             </a:r>
             <a:endParaRPr lang="en-US" sz="1400" dirty="0"/>
           </a:p>
@@ -6215,7 +6212,7 @@
                   <a:srgbClr val="374151"/>
                 </a:solidFill>
               </a:rPr>
-              <a:t>  1. 주소창 왼쪽 자물쇠 아이콘 클릭</a:t>
+              <a:t>   주소창 자물쇠 아이콘 → 사이트 설정 → 알림 허용</a:t>
             </a:r>
             <a:endParaRPr lang="en-US" sz="1400" dirty="0"/>
           </a:p>
@@ -6242,14 +6239,6 @@
           <a:bodyPr wrap="square" rtlCol="0" anchor="ctr"/>
           <a:lstStyle/>
           <a:p>
-            <a:r>
-              <a:rPr lang="en-US" sz="1400" dirty="0">
-                <a:solidFill>
-                  <a:srgbClr val="374151"/>
-                </a:solidFill>
-              </a:rPr>
-              <a:t>  2. "사이트 설정" 선택</a:t>
-            </a:r>
             <a:endParaRPr lang="en-US" sz="1400" dirty="0"/>
           </a:p>
         </p:txBody>
@@ -6281,7 +6270,7 @@
                   <a:srgbClr val="374151"/>
                 </a:solidFill>
               </a:rPr>
-              <a:t>  3. "알림"을 "허용"으로 변경</a:t>
+              <a:t>2. 운영체제 설정 확인</a:t>
             </a:r>
             <a:endParaRPr lang="en-US" sz="1400" dirty="0"/>
           </a:p>
@@ -6308,6 +6297,14 @@
           <a:bodyPr wrap="square" rtlCol="0" anchor="ctr"/>
           <a:lstStyle/>
           <a:p>
+            <a:r>
+              <a:rPr lang="en-US" sz="1400" dirty="0">
+                <a:solidFill>
+                  <a:srgbClr val="374151"/>
+                </a:solidFill>
+              </a:rPr>
+              <a:t>   Windows/macOS: 설정 → 알림 → 브라우저 앱 허용</a:t>
+            </a:r>
             <a:endParaRPr lang="en-US" sz="1400" dirty="0"/>
           </a:p>
         </p:txBody>
@@ -6333,14 +6330,6 @@
           <a:bodyPr wrap="square" rtlCol="0" anchor="ctr"/>
           <a:lstStyle/>
           <a:p>
-            <a:r>
-              <a:rPr lang="en-US" sz="1400" dirty="0">
-                <a:solidFill>
-                  <a:srgbClr val="374151"/>
-                </a:solidFill>
-              </a:rPr>
-              <a:t>Safari:</a:t>
-            </a:r>
             <a:endParaRPr lang="en-US" sz="1400" dirty="0"/>
           </a:p>
         </p:txBody>
@@ -6372,7 +6361,7 @@
                   <a:srgbClr val="374151"/>
                 </a:solidFill>
               </a:rPr>
-              <a:t>  1. Safari → 환경설정 → 웹사이트 → 알림</a:t>
+              <a:t>3. 방해 금지 모드 확인</a:t>
             </a:r>
             <a:endParaRPr lang="en-US" sz="1400" dirty="0"/>
           </a:p>
@@ -6405,7 +6394,7 @@
                   <a:srgbClr val="374151"/>
                 </a:solidFill>
               </a:rPr>
-              <a:t>  2. 해당 사이트 설정을 "허용"으로 변경</a:t>
+              <a:t>   방해 금지 모드가 켜져 있으면 알림이 표시되지 않음</a:t>
             </a:r>
             <a:endParaRPr lang="en-US" sz="1400" dirty="0"/>
           </a:p>
@@ -6489,8 +6478,8 @@
         </p:nvSpPr>
         <p:spPr>
           <a:xfrm>
-            <a:off x="457200" y="2057400"/>
-            <a:ext cx="8229600" cy="914400"/>
+            <a:off x="457200" y="274320"/>
+            <a:ext cx="8229600" cy="0"/>
           </a:xfrm>
           <a:prstGeom prst="rect">
             <a:avLst/>
@@ -6502,18 +6491,18 @@
           <a:bodyPr wrap="square" rtlCol="0" anchor="ctr"/>
           <a:lstStyle/>
           <a:p>
-            <a:pPr algn="ctr" indent="0" marL="0">
+            <a:pPr indent="0" marL="0">
               <a:buNone/>
             </a:pPr>
             <a:r>
-              <a:rPr lang="en-US" sz="4400" b="1" dirty="0">
+              <a:rPr lang="en-US" sz="2800" b="1" dirty="0">
                 <a:solidFill>
-                  <a:srgbClr val="3B82F6"/>
+                  <a:srgbClr val="1E40AF"/>
                 </a:solidFill>
               </a:rPr>
-              <a:t>감사합니다</a:t>
+              <a:t>권한 거부 시 다시 허용하기</a:t>
             </a:r>
-            <a:endParaRPr lang="en-US" sz="4400" dirty="0"/>
+            <a:endParaRPr lang="en-US" sz="2800" dirty="0"/>
           </a:p>
         </p:txBody>
       </p:sp>
@@ -6525,8 +6514,8 @@
         </p:nvSpPr>
         <p:spPr>
           <a:xfrm>
-            <a:off x="457200" y="2828925"/>
-            <a:ext cx="8229600" cy="457200"/>
+            <a:off x="640080" y="914400"/>
+            <a:ext cx="7772400" cy="0"/>
           </a:xfrm>
           <a:prstGeom prst="rect">
             <a:avLst/>
@@ -6538,18 +6527,283 @@
           <a:bodyPr wrap="square" rtlCol="0" anchor="ctr"/>
           <a:lstStyle/>
           <a:p>
-            <a:pPr algn="ctr" indent="0" marL="0">
-              <a:buNone/>
-            </a:pPr>
             <a:r>
-              <a:rPr lang="en-US" sz="1800" dirty="0">
+              <a:rPr lang="en-US" sz="1400" dirty="0">
                 <a:solidFill>
-                  <a:srgbClr val="6B7280"/>
+                  <a:srgbClr val="374151"/>
                 </a:solidFill>
               </a:rPr>
-              <a:t>문의: 관리자에게 연락</a:t>
+              <a:t>Chrome:</a:t>
             </a:r>
-            <a:endParaRPr lang="en-US" sz="1800" dirty="0"/>
+            <a:endParaRPr lang="en-US" sz="1400" dirty="0"/>
+          </a:p>
+        </p:txBody>
+      </p:sp>
+      <p:sp>
+        <p:nvSpPr>
+          <p:cNvPr id="4" name="Text 2"/>
+          <p:cNvSpPr/>
+          <p:nvPr/>
+        </p:nvSpPr>
+        <p:spPr>
+          <a:xfrm>
+            <a:off x="640080" y="1280160"/>
+            <a:ext cx="7772400" cy="0"/>
+          </a:xfrm>
+          <a:prstGeom prst="rect">
+            <a:avLst/>
+          </a:prstGeom>
+          <a:noFill/>
+          <a:ln/>
+        </p:spPr>
+        <p:txBody>
+          <a:bodyPr wrap="square" rtlCol="0" anchor="ctr"/>
+          <a:lstStyle/>
+          <a:p>
+            <a:r>
+              <a:rPr lang="en-US" sz="1400" dirty="0">
+                <a:solidFill>
+                  <a:srgbClr val="374151"/>
+                </a:solidFill>
+              </a:rPr>
+              <a:t>  1. 주소창 왼쪽 자물쇠 아이콘 클릭</a:t>
+            </a:r>
+            <a:endParaRPr lang="en-US" sz="1400" dirty="0"/>
+          </a:p>
+        </p:txBody>
+      </p:sp>
+      <p:sp>
+        <p:nvSpPr>
+          <p:cNvPr id="5" name="Text 3"/>
+          <p:cNvSpPr/>
+          <p:nvPr/>
+        </p:nvSpPr>
+        <p:spPr>
+          <a:xfrm>
+            <a:off x="640080" y="1645920"/>
+            <a:ext cx="7772400" cy="0"/>
+          </a:xfrm>
+          <a:prstGeom prst="rect">
+            <a:avLst/>
+          </a:prstGeom>
+          <a:noFill/>
+          <a:ln/>
+        </p:spPr>
+        <p:txBody>
+          <a:bodyPr wrap="square" rtlCol="0" anchor="ctr"/>
+          <a:lstStyle/>
+          <a:p>
+            <a:r>
+              <a:rPr lang="en-US" sz="1400" dirty="0">
+                <a:solidFill>
+                  <a:srgbClr val="374151"/>
+                </a:solidFill>
+              </a:rPr>
+              <a:t>  2. "사이트 설정" 선택</a:t>
+            </a:r>
+            <a:endParaRPr lang="en-US" sz="1400" dirty="0"/>
+          </a:p>
+        </p:txBody>
+      </p:sp>
+      <p:sp>
+        <p:nvSpPr>
+          <p:cNvPr id="6" name="Text 4"/>
+          <p:cNvSpPr/>
+          <p:nvPr/>
+        </p:nvSpPr>
+        <p:spPr>
+          <a:xfrm>
+            <a:off x="640080" y="2011680"/>
+            <a:ext cx="7772400" cy="0"/>
+          </a:xfrm>
+          <a:prstGeom prst="rect">
+            <a:avLst/>
+          </a:prstGeom>
+          <a:noFill/>
+          <a:ln/>
+        </p:spPr>
+        <p:txBody>
+          <a:bodyPr wrap="square" rtlCol="0" anchor="ctr"/>
+          <a:lstStyle/>
+          <a:p>
+            <a:r>
+              <a:rPr lang="en-US" sz="1400" dirty="0">
+                <a:solidFill>
+                  <a:srgbClr val="374151"/>
+                </a:solidFill>
+              </a:rPr>
+              <a:t>  3. "알림"을 "허용"으로 변경</a:t>
+            </a:r>
+            <a:endParaRPr lang="en-US" sz="1400" dirty="0"/>
+          </a:p>
+        </p:txBody>
+      </p:sp>
+      <p:sp>
+        <p:nvSpPr>
+          <p:cNvPr id="7" name="Text 5"/>
+          <p:cNvSpPr/>
+          <p:nvPr/>
+        </p:nvSpPr>
+        <p:spPr>
+          <a:xfrm>
+            <a:off x="640080" y="2377440"/>
+            <a:ext cx="7772400" cy="0"/>
+          </a:xfrm>
+          <a:prstGeom prst="rect">
+            <a:avLst/>
+          </a:prstGeom>
+          <a:noFill/>
+          <a:ln/>
+        </p:spPr>
+        <p:txBody>
+          <a:bodyPr wrap="square" rtlCol="0" anchor="ctr"/>
+          <a:lstStyle/>
+          <a:p>
+            <a:endParaRPr lang="en-US" sz="1400" dirty="0"/>
+          </a:p>
+        </p:txBody>
+      </p:sp>
+      <p:sp>
+        <p:nvSpPr>
+          <p:cNvPr id="8" name="Text 6"/>
+          <p:cNvSpPr/>
+          <p:nvPr/>
+        </p:nvSpPr>
+        <p:spPr>
+          <a:xfrm>
+            <a:off x="640080" y="2743200"/>
+            <a:ext cx="7772400" cy="0"/>
+          </a:xfrm>
+          <a:prstGeom prst="rect">
+            <a:avLst/>
+          </a:prstGeom>
+          <a:noFill/>
+          <a:ln/>
+        </p:spPr>
+        <p:txBody>
+          <a:bodyPr wrap="square" rtlCol="0" anchor="ctr"/>
+          <a:lstStyle/>
+          <a:p>
+            <a:r>
+              <a:rPr lang="en-US" sz="1400" dirty="0">
+                <a:solidFill>
+                  <a:srgbClr val="374151"/>
+                </a:solidFill>
+              </a:rPr>
+              <a:t>Safari:</a:t>
+            </a:r>
+            <a:endParaRPr lang="en-US" sz="1400" dirty="0"/>
+          </a:p>
+        </p:txBody>
+      </p:sp>
+      <p:sp>
+        <p:nvSpPr>
+          <p:cNvPr id="9" name="Text 7"/>
+          <p:cNvSpPr/>
+          <p:nvPr/>
+        </p:nvSpPr>
+        <p:spPr>
+          <a:xfrm>
+            <a:off x="640080" y="3108960"/>
+            <a:ext cx="7772400" cy="0"/>
+          </a:xfrm>
+          <a:prstGeom prst="rect">
+            <a:avLst/>
+          </a:prstGeom>
+          <a:noFill/>
+          <a:ln/>
+        </p:spPr>
+        <p:txBody>
+          <a:bodyPr wrap="square" rtlCol="0" anchor="ctr"/>
+          <a:lstStyle/>
+          <a:p>
+            <a:r>
+              <a:rPr lang="en-US" sz="1400" dirty="0">
+                <a:solidFill>
+                  <a:srgbClr val="374151"/>
+                </a:solidFill>
+              </a:rPr>
+              <a:t>  1. Safari → 환경설정 → 웹사이트 → 알림</a:t>
+            </a:r>
+            <a:endParaRPr lang="en-US" sz="1400" dirty="0"/>
+          </a:p>
+        </p:txBody>
+      </p:sp>
+      <p:sp>
+        <p:nvSpPr>
+          <p:cNvPr id="10" name="Text 8"/>
+          <p:cNvSpPr/>
+          <p:nvPr/>
+        </p:nvSpPr>
+        <p:spPr>
+          <a:xfrm>
+            <a:off x="640080" y="3474720"/>
+            <a:ext cx="7772400" cy="0"/>
+          </a:xfrm>
+          <a:prstGeom prst="rect">
+            <a:avLst/>
+          </a:prstGeom>
+          <a:noFill/>
+          <a:ln/>
+        </p:spPr>
+        <p:txBody>
+          <a:bodyPr wrap="square" rtlCol="0" anchor="ctr"/>
+          <a:lstStyle/>
+          <a:p>
+            <a:r>
+              <a:rPr lang="en-US" sz="1400" dirty="0">
+                <a:solidFill>
+                  <a:srgbClr val="374151"/>
+                </a:solidFill>
+              </a:rPr>
+              <a:t>  2. 해당 사이트 설정을 "허용"으로 변경</a:t>
+            </a:r>
+            <a:endParaRPr lang="en-US" sz="1400" dirty="0"/>
+          </a:p>
+        </p:txBody>
+      </p:sp>
+      <p:sp>
+        <p:nvSpPr>
+          <p:cNvPr id="25" name="Slide Number Placeholder 0"/>
+          <p:cNvSpPr>
+            <a:spLocks noGrp="1"/>
+          </p:cNvSpPr>
+          <p:nvPr>
+            <p:ph type="sldNum" sz="quarter" idx="4294967295"/>
+          </p:nvPr>
+        </p:nvSpPr>
+        <p:spPr>
+          <a:xfrm>
+            <a:off x="8686800" y="4937760"/>
+            <a:ext cx="800000" cy="300000"/>
+          </a:xfrm>
+          <a:prstGeom prst="rect">
+            <a:avLst/>
+          </a:prstGeom>
+          <a:extLst>
+            <a:ext uri="{C572A759-6A51-4108-AA02-DFA0A04FC94B}">
+              <ma14:wrappingTextBoxFlag xmlns:ma14="http://schemas.microsoft.com/office/mac/drawingml/2011/main" val="0"/>
+            </a:ext>
+          </a:extLst>
+        </p:spPr>
+        <p:txBody>
+          <a:bodyPr/>
+          <a:lstStyle>
+            <a:lvl1pPr>
+              <a:defRPr sz="1000">
+                <a:solidFill>
+                  <a:srgbClr val="FFFFFF"/>
+                </a:solidFill>
+              </a:defRPr>
+            </a:lvl1pPr>
+          </a:lstStyle>
+          <a:p>
+            <a:pPr algn="l"/>
+            <a:fld id="{F7021451-1387-4CA6-816F-3879F97B5CBC}" type="slidenum">
+              <a:rPr b="0" lang="en-US"/>
+              <a:t>9</a:t>
+            </a:fld>
+            <a:endParaRPr lang="en-US"/>
           </a:p>
         </p:txBody>
       </p:sp>
